--- a/m7/diapositivos/sessao-06-m7-f15.pptx
+++ b/m7/diapositivos/sessao-06-m7-f15.pptx
@@ -2862,7 +2862,35 @@
                 <a:ea typeface="Arial" pitchFamily="34" charset="-122"/>
                 <a:cs typeface="Arial" pitchFamily="34" charset="-120"/>
               </a:rPr>
-              <a:t>Fernando Pessoa (5-9-1933), Poesias, Ática, 1942, Arquivo Pessoa</a:t>
+              <a:t>Fernando Pessoa (5-9-1933), </a:t>
+            </a:r>
+            <a:pPr indent="0" marL="0">
+              <a:buNone/>
+            </a:pPr>
+            <a:r>
+              <a:rPr lang="en-US" sz="1200" i="1" dirty="0">
+                <a:solidFill>
+                  <a:srgbClr val="A9A79F"/>
+                </a:solidFill>
+                <a:latin typeface="Arial" pitchFamily="34" charset="0"/>
+                <a:ea typeface="Arial" pitchFamily="34" charset="-122"/>
+                <a:cs typeface="Arial" pitchFamily="34" charset="-120"/>
+              </a:rPr>
+              <a:t>Poesias</a:t>
+            </a:r>
+            <a:pPr indent="0" marL="0">
+              <a:buNone/>
+            </a:pPr>
+            <a:r>
+              <a:rPr lang="en-US" sz="1200" dirty="0">
+                <a:solidFill>
+                  <a:srgbClr val="A9A79F"/>
+                </a:solidFill>
+                <a:latin typeface="Arial" pitchFamily="34" charset="0"/>
+                <a:ea typeface="Arial" pitchFamily="34" charset="-122"/>
+                <a:cs typeface="Arial" pitchFamily="34" charset="-120"/>
+              </a:rPr>
+              <a:t>, Ática, 1942, Arquivo Pessoa</a:t>
             </a:r>
             <a:endParaRPr lang="en-US" sz="1200" dirty="0"/>
           </a:p>
@@ -4712,13 +4740,10 @@
               <a:lnSpc>
                 <a:spcPct val="120000"/>
               </a:lnSpc>
-              <a:spcAft>
-                <a:spcPts val="1000"/>
-              </a:spcAft>
-              <a:buNone/>
-            </a:pPr>
-            <a:r>
-              <a:rPr lang="en-US" sz="2300" dirty="0">
+              <a:buNone/>
+            </a:pPr>
+            <a:r>
+              <a:rPr lang="en-US" sz="2300" b="1" dirty="0">
                 <a:solidFill>
                   <a:srgbClr val="F2F0EA"/>
                 </a:solidFill>
@@ -4726,18 +4751,12 @@
                 <a:ea typeface="Georgia" pitchFamily="34" charset="-122"/>
                 <a:cs typeface="Georgia" pitchFamily="34" charset="-120"/>
               </a:rPr>
-              <a:t>Sigla: iniciais lidas letra a letra (PTM).</a:t>
-            </a:r>
-            <a:endParaRPr lang="en-US" sz="2300" dirty="0"/>
-          </a:p>
-          <a:p>
+              <a:t>Sigla</a:t>
+            </a:r>
             <a:pPr indent="0" marL="0">
               <a:lnSpc>
                 <a:spcPct val="120000"/>
               </a:lnSpc>
-              <a:spcAft>
-                <a:spcPts val="1000"/>
-              </a:spcAft>
               <a:buNone/>
             </a:pPr>
             <a:r>
@@ -4749,22 +4768,16 @@
                 <a:ea typeface="Georgia" pitchFamily="34" charset="-122"/>
                 <a:cs typeface="Georgia" pitchFamily="34" charset="-120"/>
               </a:rPr>
-              <a:t>Acrónimo: iniciais lidas como palavra (ONU).</a:t>
-            </a:r>
-            <a:endParaRPr lang="en-US" sz="2300" dirty="0"/>
-          </a:p>
-          <a:p>
+              <a:t>: iniciais lidas letra a letra (PTM). </a:t>
+            </a:r>
             <a:pPr indent="0" marL="0">
               <a:lnSpc>
                 <a:spcPct val="120000"/>
               </a:lnSpc>
-              <a:spcAft>
-                <a:spcPts val="1000"/>
-              </a:spcAft>
-              <a:buNone/>
-            </a:pPr>
-            <a:r>
-              <a:rPr lang="en-US" sz="2300" dirty="0">
+              <a:buNone/>
+            </a:pPr>
+            <a:r>
+              <a:rPr lang="en-US" sz="2300" b="1" dirty="0">
                 <a:solidFill>
                   <a:srgbClr val="F2F0EA"/>
                 </a:solidFill>
@@ -4772,18 +4785,12 @@
                 <a:ea typeface="Georgia" pitchFamily="34" charset="-122"/>
                 <a:cs typeface="Georgia" pitchFamily="34" charset="-120"/>
               </a:rPr>
-              <a:t>Truncação: corta-se parte da palavra (foto ← fotografia).</a:t>
-            </a:r>
-            <a:endParaRPr lang="en-US" sz="2300" dirty="0"/>
-          </a:p>
-          <a:p>
+              <a:t>Acrónimo</a:t>
+            </a:r>
             <a:pPr indent="0" marL="0">
               <a:lnSpc>
                 <a:spcPct val="120000"/>
               </a:lnSpc>
-              <a:spcAft>
-                <a:spcPts val="1000"/>
-              </a:spcAft>
               <a:buNone/>
             </a:pPr>
             <a:r>
@@ -4795,22 +4802,16 @@
                 <a:ea typeface="Georgia" pitchFamily="34" charset="-122"/>
                 <a:cs typeface="Georgia" pitchFamily="34" charset="-120"/>
               </a:rPr>
-              <a:t>Amálgama: juntam-se partes de duas palavras (portunhol ← português + espanhol).</a:t>
-            </a:r>
-            <a:endParaRPr lang="en-US" sz="2300" dirty="0"/>
-          </a:p>
-          <a:p>
+              <a:t>: iniciais lidas como palavra (ONU). </a:t>
+            </a:r>
             <a:pPr indent="0" marL="0">
               <a:lnSpc>
                 <a:spcPct val="120000"/>
               </a:lnSpc>
-              <a:spcAft>
-                <a:spcPts val="1000"/>
-              </a:spcAft>
-              <a:buNone/>
-            </a:pPr>
-            <a:r>
-              <a:rPr lang="en-US" sz="2300" dirty="0">
+              <a:buNone/>
+            </a:pPr>
+            <a:r>
+              <a:rPr lang="en-US" sz="2300" b="1" dirty="0">
                 <a:solidFill>
                   <a:srgbClr val="F2F0EA"/>
                 </a:solidFill>
@@ -4818,18 +4819,12 @@
                 <a:ea typeface="Georgia" pitchFamily="34" charset="-122"/>
                 <a:cs typeface="Georgia" pitchFamily="34" charset="-120"/>
               </a:rPr>
-              <a:t>Empréstimo: palavra de outra língua (futebol ← football).</a:t>
-            </a:r>
-            <a:endParaRPr lang="en-US" sz="2300" dirty="0"/>
-          </a:p>
-          <a:p>
+              <a:t>Truncação</a:t>
+            </a:r>
             <a:pPr indent="0" marL="0">
               <a:lnSpc>
                 <a:spcPct val="120000"/>
               </a:lnSpc>
-              <a:spcAft>
-                <a:spcPts val="1000"/>
-              </a:spcAft>
               <a:buNone/>
             </a:pPr>
             <a:r>
@@ -4841,22 +4836,16 @@
                 <a:ea typeface="Georgia" pitchFamily="34" charset="-122"/>
                 <a:cs typeface="Georgia" pitchFamily="34" charset="-120"/>
               </a:rPr>
-              <a:t>Extensão semântica: palavra antiga ganha sentido novo (rato, do computador).</a:t>
-            </a:r>
-            <a:endParaRPr lang="en-US" sz="2300" dirty="0"/>
-          </a:p>
-          <a:p>
+              <a:t>: corta-se parte da palavra (foto ← fotografia). </a:t>
+            </a:r>
             <a:pPr indent="0" marL="0">
               <a:lnSpc>
                 <a:spcPct val="120000"/>
               </a:lnSpc>
-              <a:spcAft>
-                <a:spcPts val="1000"/>
-              </a:spcAft>
-              <a:buNone/>
-            </a:pPr>
-            <a:r>
-              <a:rPr lang="en-US" sz="2300" dirty="0">
+              <a:buNone/>
+            </a:pPr>
+            <a:r>
+              <a:rPr lang="en-US" sz="2300" b="1" dirty="0">
                 <a:solidFill>
                   <a:srgbClr val="F2F0EA"/>
                 </a:solidFill>
@@ -4864,7 +4853,160 @@
                 <a:ea typeface="Georgia" pitchFamily="34" charset="-122"/>
                 <a:cs typeface="Georgia" pitchFamily="34" charset="-120"/>
               </a:rPr>
-              <a:t>Onomatopeia: imita um som (tiquetaque).</a:t>
+              <a:t>Amálgama</a:t>
+            </a:r>
+            <a:pPr indent="0" marL="0">
+              <a:lnSpc>
+                <a:spcPct val="120000"/>
+              </a:lnSpc>
+              <a:buNone/>
+            </a:pPr>
+            <a:r>
+              <a:rPr lang="en-US" sz="2300" dirty="0">
+                <a:solidFill>
+                  <a:srgbClr val="F2F0EA"/>
+                </a:solidFill>
+                <a:latin typeface="Georgia" pitchFamily="34" charset="0"/>
+                <a:ea typeface="Georgia" pitchFamily="34" charset="-122"/>
+                <a:cs typeface="Georgia" pitchFamily="34" charset="-120"/>
+              </a:rPr>
+              <a:t>: juntam-se partes de duas palavras (portunhol ← português + espanhol). </a:t>
+            </a:r>
+            <a:pPr indent="0" marL="0">
+              <a:lnSpc>
+                <a:spcPct val="120000"/>
+              </a:lnSpc>
+              <a:buNone/>
+            </a:pPr>
+            <a:r>
+              <a:rPr lang="en-US" sz="2300" b="1" dirty="0">
+                <a:solidFill>
+                  <a:srgbClr val="F2F0EA"/>
+                </a:solidFill>
+                <a:latin typeface="Georgia" pitchFamily="34" charset="0"/>
+                <a:ea typeface="Georgia" pitchFamily="34" charset="-122"/>
+                <a:cs typeface="Georgia" pitchFamily="34" charset="-120"/>
+              </a:rPr>
+              <a:t>Empréstimo</a:t>
+            </a:r>
+            <a:pPr indent="0" marL="0">
+              <a:lnSpc>
+                <a:spcPct val="120000"/>
+              </a:lnSpc>
+              <a:buNone/>
+            </a:pPr>
+            <a:r>
+              <a:rPr lang="en-US" sz="2300" dirty="0">
+                <a:solidFill>
+                  <a:srgbClr val="F2F0EA"/>
+                </a:solidFill>
+                <a:latin typeface="Georgia" pitchFamily="34" charset="0"/>
+                <a:ea typeface="Georgia" pitchFamily="34" charset="-122"/>
+                <a:cs typeface="Georgia" pitchFamily="34" charset="-120"/>
+              </a:rPr>
+              <a:t>: palavra de outra língua (futebol ← </a:t>
+            </a:r>
+            <a:pPr indent="0" marL="0">
+              <a:lnSpc>
+                <a:spcPct val="120000"/>
+              </a:lnSpc>
+              <a:buNone/>
+            </a:pPr>
+            <a:r>
+              <a:rPr lang="en-US" sz="2300" i="1" dirty="0">
+                <a:solidFill>
+                  <a:srgbClr val="F2F0EA"/>
+                </a:solidFill>
+                <a:latin typeface="Georgia" pitchFamily="34" charset="0"/>
+                <a:ea typeface="Georgia" pitchFamily="34" charset="-122"/>
+                <a:cs typeface="Georgia" pitchFamily="34" charset="-120"/>
+              </a:rPr>
+              <a:t>football</a:t>
+            </a:r>
+            <a:pPr indent="0" marL="0">
+              <a:lnSpc>
+                <a:spcPct val="120000"/>
+              </a:lnSpc>
+              <a:buNone/>
+            </a:pPr>
+            <a:r>
+              <a:rPr lang="en-US" sz="2300" dirty="0">
+                <a:solidFill>
+                  <a:srgbClr val="F2F0EA"/>
+                </a:solidFill>
+                <a:latin typeface="Georgia" pitchFamily="34" charset="0"/>
+                <a:ea typeface="Georgia" pitchFamily="34" charset="-122"/>
+                <a:cs typeface="Georgia" pitchFamily="34" charset="-120"/>
+              </a:rPr>
+              <a:t>). </a:t>
+            </a:r>
+            <a:pPr indent="0" marL="0">
+              <a:lnSpc>
+                <a:spcPct val="120000"/>
+              </a:lnSpc>
+              <a:buNone/>
+            </a:pPr>
+            <a:r>
+              <a:rPr lang="en-US" sz="2300" b="1" dirty="0">
+                <a:solidFill>
+                  <a:srgbClr val="F2F0EA"/>
+                </a:solidFill>
+                <a:latin typeface="Georgia" pitchFamily="34" charset="0"/>
+                <a:ea typeface="Georgia" pitchFamily="34" charset="-122"/>
+                <a:cs typeface="Georgia" pitchFamily="34" charset="-120"/>
+              </a:rPr>
+              <a:t>Extensão semântica</a:t>
+            </a:r>
+            <a:pPr indent="0" marL="0">
+              <a:lnSpc>
+                <a:spcPct val="120000"/>
+              </a:lnSpc>
+              <a:buNone/>
+            </a:pPr>
+            <a:r>
+              <a:rPr lang="en-US" sz="2300" dirty="0">
+                <a:solidFill>
+                  <a:srgbClr val="F2F0EA"/>
+                </a:solidFill>
+                <a:latin typeface="Georgia" pitchFamily="34" charset="0"/>
+                <a:ea typeface="Georgia" pitchFamily="34" charset="-122"/>
+                <a:cs typeface="Georgia" pitchFamily="34" charset="-120"/>
+              </a:rPr>
+              <a:t>: palavra antiga ganha sentido novo (rato, do computador). </a:t>
+            </a:r>
+            <a:pPr indent="0" marL="0">
+              <a:lnSpc>
+                <a:spcPct val="120000"/>
+              </a:lnSpc>
+              <a:buNone/>
+            </a:pPr>
+            <a:r>
+              <a:rPr lang="en-US" sz="2300" b="1" dirty="0">
+                <a:solidFill>
+                  <a:srgbClr val="F2F0EA"/>
+                </a:solidFill>
+                <a:latin typeface="Georgia" pitchFamily="34" charset="0"/>
+                <a:ea typeface="Georgia" pitchFamily="34" charset="-122"/>
+                <a:cs typeface="Georgia" pitchFamily="34" charset="-120"/>
+              </a:rPr>
+              <a:t>Onomatopeia</a:t>
+            </a:r>
+            <a:pPr indent="0" marL="0">
+              <a:lnSpc>
+                <a:spcPct val="120000"/>
+              </a:lnSpc>
+              <a:buNone/>
+            </a:pPr>
+            <a:r>
+              <a:rPr lang="en-US" sz="2300" dirty="0">
+                <a:solidFill>
+                  <a:srgbClr val="F2F0EA"/>
+                </a:solidFill>
+                <a:latin typeface="Georgia" pitchFamily="34" charset="0"/>
+                <a:ea typeface="Georgia" pitchFamily="34" charset="-122"/>
+                <a:cs typeface="Georgia" pitchFamily="34" charset="-120"/>
+              </a:rPr>
+              <a:t>: imita um som (tiquetaque).</a:t>
             </a:r>
             <a:endParaRPr lang="en-US" sz="2300" dirty="0"/>
           </a:p>
